--- a/docs/onboarding/pptx/04-finanzas.pptx
+++ b/docs/onboarding/pptx/04-finanzas.pptx
@@ -4906,7 +4906,7 @@
         <p:spPr>
           <a:xfrm>
             <a:off x="841248" y="1353312"/>
-            <a:ext cx="10509199" cy="868680"/>
+            <a:ext cx="5120640" cy="1280160"/>
           </a:xfrm>
           <a:prstGeom prst="rect">
             <a:avLst/>
@@ -4920,7 +4920,7 @@
           <a:lstStyle/>
           <a:p>
             <a:r>
-              <a:rPr sz="3000" b="1" spc="-40">
+              <a:rPr sz="2700" b="1" spc="-40">
                 <a:solidFill>
                   <a:srgbClr val="0A0A0A"/>
                 </a:solidFill>
@@ -4939,8 +4939,8 @@
         </p:nvSpPr>
         <p:spPr>
           <a:xfrm>
-            <a:off x="841248" y="2194560"/>
-            <a:ext cx="9601200" cy="822960"/>
+            <a:off x="841248" y="1938528"/>
+            <a:ext cx="5120640" cy="1097280"/>
           </a:xfrm>
           <a:prstGeom prst="rect">
             <a:avLst/>
@@ -4955,11 +4955,11 @@
           <a:p>
             <a:pPr>
               <a:lnSpc>
-                <a:spcPct val="135000"/>
+                <a:spcPct val="130000"/>
               </a:lnSpc>
             </a:pPr>
             <a:r>
-              <a:rPr sz="1400" b="0">
+              <a:rPr sz="1300" b="0">
                 <a:solidFill>
                   <a:srgbClr val="52525B"/>
                 </a:solidFill>
@@ -4978,8 +4978,8 @@
         </p:nvSpPr>
         <p:spPr>
           <a:xfrm>
-            <a:off x="841248" y="2651760"/>
-            <a:ext cx="10509199" cy="566928"/>
+            <a:off x="841248" y="2633472"/>
+            <a:ext cx="5120640" cy="713232"/>
           </a:xfrm>
           <a:prstGeom prst="rect">
             <a:avLst/>
@@ -4992,8 +4992,13 @@
           </a:bodyPr>
           <a:lstStyle/>
           <a:p>
-            <a:r>
-              <a:rPr sz="1450" b="1">
+            <a:pPr>
+              <a:lnSpc>
+                <a:spcPct val="125000"/>
+              </a:lnSpc>
+            </a:pPr>
+            <a:r>
+              <a:rPr sz="1300" b="1">
                 <a:solidFill>
                   <a:srgbClr val="0A0A0A"/>
                 </a:solidFill>
@@ -5002,7 +5007,7 @@
               <a:t>Vehículo y ganador:  </a:t>
             </a:r>
             <a:r>
-              <a:rPr sz="1450" b="0">
+              <a:rPr sz="1300" b="0">
                 <a:solidFill>
                   <a:srgbClr val="52525B"/>
                 </a:solidFill>
@@ -5015,23 +5020,171 @@
       </p:sp>
       <p:sp>
         <p:nvSpPr>
-          <p:cNvPr id="7" name="Rectangle 6"/>
+          <p:cNvPr id="7" name="TextBox 6"/>
+          <p:cNvSpPr txBox="1"/>
+          <p:nvPr/>
+        </p:nvSpPr>
+        <p:spPr>
+          <a:xfrm>
+            <a:off x="841248" y="3346704"/>
+            <a:ext cx="5120640" cy="713232"/>
+          </a:xfrm>
+          <a:prstGeom prst="rect">
+            <a:avLst/>
+          </a:prstGeom>
+          <a:noFill/>
+        </p:spPr>
+        <p:txBody>
+          <a:bodyPr wrap="square" anchor="ctr" lIns="0" rIns="0" tIns="0" bIns="0">
+            <a:spAutoFit/>
+          </a:bodyPr>
+          <a:lstStyle/>
+          <a:p>
+            <a:pPr>
+              <a:lnSpc>
+                <a:spcPct val="125000"/>
+              </a:lnSpc>
+            </a:pPr>
+            <a:r>
+              <a:rPr sz="1300" b="1">
+                <a:solidFill>
+                  <a:srgbClr val="0A0A0A"/>
+                </a:solidFill>
+                <a:latin typeface="Calibri"/>
+              </a:rPr>
+              <a:t>Monto final:  </a:t>
+            </a:r>
+            <a:r>
+              <a:rPr sz="1300" b="0">
+                <a:solidFill>
+                  <a:srgbClr val="52525B"/>
+                </a:solidFill>
+                <a:latin typeface="Calibri"/>
+              </a:rPr>
+              <a:t>el precio de cierre de la subasta.</a:t>
+            </a:r>
+          </a:p>
+        </p:txBody>
+      </p:sp>
+      <p:sp>
+        <p:nvSpPr>
+          <p:cNvPr id="8" name="TextBox 7"/>
+          <p:cNvSpPr txBox="1"/>
+          <p:nvPr/>
+        </p:nvSpPr>
+        <p:spPr>
+          <a:xfrm>
+            <a:off x="841248" y="4059936"/>
+            <a:ext cx="5120640" cy="713232"/>
+          </a:xfrm>
+          <a:prstGeom prst="rect">
+            <a:avLst/>
+          </a:prstGeom>
+          <a:noFill/>
+        </p:spPr>
+        <p:txBody>
+          <a:bodyPr wrap="square" anchor="ctr" lIns="0" rIns="0" tIns="0" bIns="0">
+            <a:spAutoFit/>
+          </a:bodyPr>
+          <a:lstStyle/>
+          <a:p>
+            <a:pPr>
+              <a:lnSpc>
+                <a:spcPct val="125000"/>
+              </a:lnSpc>
+            </a:pPr>
+            <a:r>
+              <a:rPr sz="1300" b="1">
+                <a:solidFill>
+                  <a:srgbClr val="0A0A0A"/>
+                </a:solidFill>
+                <a:latin typeface="Calibri"/>
+              </a:rPr>
+              <a:t>Seña:  </a:t>
+            </a:r>
+            <a:r>
+              <a:rPr sz="1300" b="0">
+                <a:solidFill>
+                  <a:srgbClr val="52525B"/>
+                </a:solidFill>
+                <a:latin typeface="Calibri"/>
+              </a:rPr>
+              <a:t>el monto del depósito que debe pagar el ganador.</a:t>
+            </a:r>
+          </a:p>
+        </p:txBody>
+      </p:sp>
+      <p:sp>
+        <p:nvSpPr>
+          <p:cNvPr id="9" name="TextBox 8"/>
+          <p:cNvSpPr txBox="1"/>
+          <p:nvPr/>
+        </p:nvSpPr>
+        <p:spPr>
+          <a:xfrm>
+            <a:off x="841248" y="4773168"/>
+            <a:ext cx="5120640" cy="713232"/>
+          </a:xfrm>
+          <a:prstGeom prst="rect">
+            <a:avLst/>
+          </a:prstGeom>
+          <a:noFill/>
+        </p:spPr>
+        <p:txBody>
+          <a:bodyPr wrap="square" anchor="ctr" lIns="0" rIns="0" tIns="0" bIns="0">
+            <a:spAutoFit/>
+          </a:bodyPr>
+          <a:lstStyle/>
+          <a:p>
+            <a:pPr>
+              <a:lnSpc>
+                <a:spcPct val="125000"/>
+              </a:lnSpc>
+            </a:pPr>
+            <a:r>
+              <a:rPr sz="1300" b="1">
+                <a:solidFill>
+                  <a:srgbClr val="0A0A0A"/>
+                </a:solidFill>
+                <a:latin typeface="Calibri"/>
+              </a:rPr>
+              <a:t>Estado de pago:  </a:t>
+            </a:r>
+            <a:r>
+              <a:rPr sz="1300" b="0">
+                <a:solidFill>
+                  <a:srgbClr val="52525B"/>
+                </a:solidFill>
+                <a:latin typeface="Calibri"/>
+              </a:rPr>
+              <a:t>pendiente, confirmado o vencido.</a:t>
+            </a:r>
+          </a:p>
+        </p:txBody>
+      </p:sp>
+      <p:sp>
+        <p:nvSpPr>
+          <p:cNvPr id="10" name="Rounded Rectangle 9"/>
           <p:cNvSpPr/>
           <p:nvPr/>
         </p:nvSpPr>
         <p:spPr>
           <a:xfrm>
-            <a:off x="841248" y="3217788"/>
-            <a:ext cx="10509199" cy="900"/>
-          </a:xfrm>
-          <a:prstGeom prst="rect">
-            <a:avLst/>
+            <a:off x="6419088" y="932688"/>
+            <a:ext cx="4931359" cy="5010912"/>
+          </a:xfrm>
+          <a:prstGeom prst="roundRect">
+            <a:avLst>
+              <a:gd name="adj" fmla="val 4000"/>
+            </a:avLst>
           </a:prstGeom>
           <a:solidFill>
-            <a:srgbClr val="E4E4E7"/>
+            <a:srgbClr val="F1F1F3"/>
           </a:solidFill>
-          <a:ln>
-            <a:noFill/>
+          <a:ln w="12700">
+            <a:solidFill>
+              <a:srgbClr val="A1A1AA"/>
+            </a:solidFill>
           </a:ln>
           <a:effectLst/>
         </p:spPr>
@@ -5050,277 +5203,37 @@
           </a:fontRef>
         </p:style>
         <p:txBody>
-          <a:bodyPr rtlCol="0" anchor="ctr"/>
+          <a:bodyPr rtlCol="0" anchor="ctr" wrap="square"/>
           <a:lstStyle/>
           <a:p>
             <a:pPr algn="ctr"/>
-          </a:p>
-        </p:txBody>
-      </p:sp>
-      <p:sp>
-        <p:nvSpPr>
-          <p:cNvPr id="8" name="TextBox 7"/>
-          <p:cNvSpPr txBox="1"/>
-          <p:nvPr/>
-        </p:nvSpPr>
-        <p:spPr>
-          <a:xfrm>
-            <a:off x="841248" y="3218688"/>
-            <a:ext cx="10509199" cy="566928"/>
-          </a:xfrm>
-          <a:prstGeom prst="rect">
-            <a:avLst/>
-          </a:prstGeom>
-          <a:noFill/>
-        </p:spPr>
-        <p:txBody>
-          <a:bodyPr wrap="square" anchor="ctr" lIns="0" rIns="0" tIns="0" bIns="0">
-            <a:spAutoFit/>
-          </a:bodyPr>
-          <a:lstStyle/>
-          <a:p>
-            <a:r>
-              <a:rPr sz="1450" b="1">
-                <a:solidFill>
-                  <a:srgbClr val="0A0A0A"/>
-                </a:solidFill>
-                <a:latin typeface="Calibri"/>
-              </a:rPr>
-              <a:t>Monto final:  </a:t>
-            </a:r>
-            <a:r>
-              <a:rPr sz="1450" b="0">
-                <a:solidFill>
-                  <a:srgbClr val="52525B"/>
-                </a:solidFill>
-                <a:latin typeface="Calibri"/>
-              </a:rPr>
-              <a:t>el precio de cierre de la subasta.</a:t>
-            </a:r>
-          </a:p>
-        </p:txBody>
-      </p:sp>
-      <p:sp>
-        <p:nvSpPr>
-          <p:cNvPr id="9" name="Rectangle 8"/>
-          <p:cNvSpPr/>
-          <p:nvPr/>
-        </p:nvSpPr>
-        <p:spPr>
-          <a:xfrm>
-            <a:off x="841248" y="3784716"/>
-            <a:ext cx="10509199" cy="900"/>
-          </a:xfrm>
-          <a:prstGeom prst="rect">
-            <a:avLst/>
-          </a:prstGeom>
-          <a:solidFill>
-            <a:srgbClr val="E4E4E7"/>
-          </a:solidFill>
-          <a:ln>
-            <a:noFill/>
-          </a:ln>
-          <a:effectLst/>
-        </p:spPr>
-        <p:style>
-          <a:lnRef idx="1">
-            <a:schemeClr val="accent1"/>
-          </a:lnRef>
-          <a:fillRef idx="3">
-            <a:schemeClr val="accent1"/>
-          </a:fillRef>
-          <a:effectRef idx="2">
-            <a:schemeClr val="accent1"/>
-          </a:effectRef>
-          <a:fontRef idx="minor">
-            <a:schemeClr val="lt1"/>
-          </a:fontRef>
-        </p:style>
-        <p:txBody>
-          <a:bodyPr rtlCol="0" anchor="ctr"/>
-          <a:lstStyle/>
+            <a:r>
+              <a:rPr sz="1200" b="1" spc="120">
+                <a:solidFill>
+                  <a:srgbClr val="71717A"/>
+                </a:solidFill>
+                <a:latin typeface="Calibri"/>
+              </a:rPr>
+              <a:t>CAPTURA PENDIENTE</a:t>
+            </a:r>
+          </a:p>
           <a:p>
             <a:pPr algn="ctr"/>
-          </a:p>
-        </p:txBody>
-      </p:sp>
-      <p:sp>
-        <p:nvSpPr>
-          <p:cNvPr id="10" name="TextBox 9"/>
-          <p:cNvSpPr txBox="1"/>
-          <p:nvPr/>
-        </p:nvSpPr>
-        <p:spPr>
-          <a:xfrm>
-            <a:off x="841248" y="3785616"/>
-            <a:ext cx="10509199" cy="566928"/>
-          </a:xfrm>
-          <a:prstGeom prst="rect">
-            <a:avLst/>
-          </a:prstGeom>
-          <a:noFill/>
-        </p:spPr>
-        <p:txBody>
-          <a:bodyPr wrap="square" anchor="ctr" lIns="0" rIns="0" tIns="0" bIns="0">
-            <a:spAutoFit/>
-          </a:bodyPr>
-          <a:lstStyle/>
-          <a:p>
-            <a:r>
-              <a:rPr sz="1450" b="1">
-                <a:solidFill>
-                  <a:srgbClr val="0A0A0A"/>
-                </a:solidFill>
-                <a:latin typeface="Calibri"/>
-              </a:rPr>
-              <a:t>Seña:  </a:t>
-            </a:r>
-            <a:r>
-              <a:rPr sz="1450" b="0">
-                <a:solidFill>
-                  <a:srgbClr val="52525B"/>
-                </a:solidFill>
-                <a:latin typeface="Calibri"/>
-              </a:rPr>
-              <a:t>el monto del depósito que debe pagar el ganador.</a:t>
-            </a:r>
-          </a:p>
-        </p:txBody>
-      </p:sp>
-      <p:sp>
-        <p:nvSpPr>
-          <p:cNvPr id="11" name="Rectangle 10"/>
-          <p:cNvSpPr/>
-          <p:nvPr/>
-        </p:nvSpPr>
-        <p:spPr>
-          <a:xfrm>
-            <a:off x="841248" y="4351644"/>
-            <a:ext cx="10509199" cy="900"/>
-          </a:xfrm>
-          <a:prstGeom prst="rect">
-            <a:avLst/>
-          </a:prstGeom>
-          <a:solidFill>
-            <a:srgbClr val="E4E4E7"/>
-          </a:solidFill>
-          <a:ln>
-            <a:noFill/>
-          </a:ln>
-          <a:effectLst/>
-        </p:spPr>
-        <p:style>
-          <a:lnRef idx="1">
-            <a:schemeClr val="accent1"/>
-          </a:lnRef>
-          <a:fillRef idx="3">
-            <a:schemeClr val="accent1"/>
-          </a:fillRef>
-          <a:effectRef idx="2">
-            <a:schemeClr val="accent1"/>
-          </a:effectRef>
-          <a:fontRef idx="minor">
-            <a:schemeClr val="lt1"/>
-          </a:fontRef>
-        </p:style>
-        <p:txBody>
-          <a:bodyPr rtlCol="0" anchor="ctr"/>
-          <a:lstStyle/>
-          <a:p>
-            <a:pPr algn="ctr"/>
-          </a:p>
-        </p:txBody>
-      </p:sp>
-      <p:sp>
-        <p:nvSpPr>
-          <p:cNvPr id="12" name="TextBox 11"/>
-          <p:cNvSpPr txBox="1"/>
-          <p:nvPr/>
-        </p:nvSpPr>
-        <p:spPr>
-          <a:xfrm>
-            <a:off x="841248" y="4352544"/>
-            <a:ext cx="10509199" cy="566928"/>
-          </a:xfrm>
-          <a:prstGeom prst="rect">
-            <a:avLst/>
-          </a:prstGeom>
-          <a:noFill/>
-        </p:spPr>
-        <p:txBody>
-          <a:bodyPr wrap="square" anchor="ctr" lIns="0" rIns="0" tIns="0" bIns="0">
-            <a:spAutoFit/>
-          </a:bodyPr>
-          <a:lstStyle/>
-          <a:p>
-            <a:r>
-              <a:rPr sz="1450" b="1">
-                <a:solidFill>
-                  <a:srgbClr val="0A0A0A"/>
-                </a:solidFill>
-                <a:latin typeface="Calibri"/>
-              </a:rPr>
-              <a:t>Estado de pago:  </a:t>
-            </a:r>
-            <a:r>
-              <a:rPr sz="1450" b="0">
-                <a:solidFill>
-                  <a:srgbClr val="52525B"/>
-                </a:solidFill>
-                <a:latin typeface="Calibri"/>
-              </a:rPr>
-              <a:t>pendiente, confirmado o vencido.</a:t>
-            </a:r>
-          </a:p>
-        </p:txBody>
-      </p:sp>
-      <p:sp>
-        <p:nvSpPr>
-          <p:cNvPr id="13" name="Rectangle 12"/>
-          <p:cNvSpPr/>
-          <p:nvPr/>
-        </p:nvSpPr>
-        <p:spPr>
-          <a:xfrm>
-            <a:off x="841248" y="4918572"/>
-            <a:ext cx="10509199" cy="900"/>
-          </a:xfrm>
-          <a:prstGeom prst="rect">
-            <a:avLst/>
-          </a:prstGeom>
-          <a:solidFill>
-            <a:srgbClr val="E4E4E7"/>
-          </a:solidFill>
-          <a:ln>
-            <a:noFill/>
-          </a:ln>
-          <a:effectLst/>
-        </p:spPr>
-        <p:style>
-          <a:lnRef idx="1">
-            <a:schemeClr val="accent1"/>
-          </a:lnRef>
-          <a:fillRef idx="3">
-            <a:schemeClr val="accent1"/>
-          </a:fillRef>
-          <a:effectRef idx="2">
-            <a:schemeClr val="accent1"/>
-          </a:effectRef>
-          <a:fontRef idx="minor">
-            <a:schemeClr val="lt1"/>
-          </a:fontRef>
-        </p:style>
-        <p:txBody>
-          <a:bodyPr rtlCol="0" anchor="ctr"/>
-          <a:lstStyle/>
-          <a:p>
-            <a:pPr algn="ctr"/>
+            <a:r>
+              <a:rPr sz="1050" b="0">
+                <a:solidFill>
+                  <a:srgbClr val="A1A1AA"/>
+                </a:solidFill>
+                <a:latin typeface="Calibri"/>
+              </a:rPr>
+              <a:t>Registro de ventas en tiempo real</a:t>
+            </a:r>
           </a:p>
         </p:txBody>
       </p:sp>
       <p:pic>
         <p:nvPicPr>
-          <p:cNvPr id="14" name="Picture 13" descr="renew-wordmark-black.png"/>
+          <p:cNvPr id="11" name="Picture 10" descr="renew-wordmark-black.png"/>
           <p:cNvPicPr>
             <a:picLocks noChangeAspect="1"/>
           </p:cNvPicPr>
@@ -5344,7 +5257,7 @@
       </p:pic>
       <p:sp>
         <p:nvSpPr>
-          <p:cNvPr id="15" name="TextBox 14"/>
+          <p:cNvPr id="12" name="TextBox 11"/>
           <p:cNvSpPr txBox="1"/>
           <p:nvPr/>
         </p:nvSpPr>
@@ -6360,7 +6273,7 @@
         <p:spPr>
           <a:xfrm>
             <a:off x="841248" y="1353312"/>
-            <a:ext cx="10509199" cy="868680"/>
+            <a:ext cx="5120640" cy="1280160"/>
           </a:xfrm>
           <a:prstGeom prst="rect">
             <a:avLst/>
@@ -6374,7 +6287,7 @@
           <a:lstStyle/>
           <a:p>
             <a:r>
-              <a:rPr sz="3000" b="1" spc="-40">
+              <a:rPr sz="2700" b="1" spc="-40">
                 <a:solidFill>
                   <a:srgbClr val="0A0A0A"/>
                 </a:solidFill>
@@ -6393,8 +6306,8 @@
         </p:nvSpPr>
         <p:spPr>
           <a:xfrm>
-            <a:off x="841248" y="2194560"/>
-            <a:ext cx="457200" cy="457200"/>
+            <a:off x="841248" y="1938528"/>
+            <a:ext cx="402336" cy="402336"/>
           </a:xfrm>
           <a:prstGeom prst="ellipse">
             <a:avLst/>
@@ -6427,7 +6340,7 @@
           <a:p>
             <a:pPr algn="ctr"/>
             <a:r>
-              <a:rPr sz="1500" b="1">
+              <a:rPr sz="1300" b="1">
                 <a:solidFill>
                   <a:srgbClr val="FFFFFF"/>
                 </a:solidFill>
@@ -6446,8 +6359,8 @@
         </p:nvSpPr>
         <p:spPr>
           <a:xfrm>
-            <a:off x="1554480" y="2176272"/>
-            <a:ext cx="9795967" cy="960120"/>
+            <a:off x="1463040" y="1920240"/>
+            <a:ext cx="4498848" cy="914400"/>
           </a:xfrm>
           <a:prstGeom prst="rect">
             <a:avLst/>
@@ -6461,7 +6374,7 @@
           <a:lstStyle/>
           <a:p>
             <a:r>
-              <a:rPr sz="1500" b="1">
+              <a:rPr sz="1350" b="1">
                 <a:solidFill>
                   <a:srgbClr val="0A0A0A"/>
                 </a:solidFill>
@@ -6473,11 +6386,11 @@
           <a:p>
             <a:pPr>
               <a:lnSpc>
-                <a:spcPct val="128000"/>
+                <a:spcPct val="125000"/>
               </a:lnSpc>
             </a:pPr>
             <a:r>
-              <a:rPr sz="1250" b="0">
+              <a:rPr sz="1100" b="0">
                 <a:solidFill>
                   <a:srgbClr val="52525B"/>
                 </a:solidFill>
@@ -6496,8 +6409,8 @@
         </p:nvSpPr>
         <p:spPr>
           <a:xfrm>
-            <a:off x="841248" y="3154680"/>
-            <a:ext cx="457200" cy="457200"/>
+            <a:off x="841248" y="2852928"/>
+            <a:ext cx="402336" cy="402336"/>
           </a:xfrm>
           <a:prstGeom prst="ellipse">
             <a:avLst/>
@@ -6530,7 +6443,7 @@
           <a:p>
             <a:pPr algn="ctr"/>
             <a:r>
-              <a:rPr sz="1500" b="1">
+              <a:rPr sz="1300" b="1">
                 <a:solidFill>
                   <a:srgbClr val="FFFFFF"/>
                 </a:solidFill>
@@ -6549,8 +6462,8 @@
         </p:nvSpPr>
         <p:spPr>
           <a:xfrm>
-            <a:off x="1554480" y="3136392"/>
-            <a:ext cx="9795967" cy="960120"/>
+            <a:off x="1463040" y="2834640"/>
+            <a:ext cx="4498848" cy="914400"/>
           </a:xfrm>
           <a:prstGeom prst="rect">
             <a:avLst/>
@@ -6564,7 +6477,7 @@
           <a:lstStyle/>
           <a:p>
             <a:r>
-              <a:rPr sz="1500" b="1">
+              <a:rPr sz="1350" b="1">
                 <a:solidFill>
                   <a:srgbClr val="0A0A0A"/>
                 </a:solidFill>
@@ -6576,11 +6489,11 @@
           <a:p>
             <a:pPr>
               <a:lnSpc>
-                <a:spcPct val="128000"/>
+                <a:spcPct val="125000"/>
               </a:lnSpc>
             </a:pPr>
             <a:r>
-              <a:rPr sz="1250" b="0">
+              <a:rPr sz="1100" b="0">
                 <a:solidFill>
                   <a:srgbClr val="52525B"/>
                 </a:solidFill>
@@ -6599,8 +6512,8 @@
         </p:nvSpPr>
         <p:spPr>
           <a:xfrm>
-            <a:off x="841248" y="4114800"/>
-            <a:ext cx="457200" cy="457200"/>
+            <a:off x="841248" y="3767328"/>
+            <a:ext cx="402336" cy="402336"/>
           </a:xfrm>
           <a:prstGeom prst="ellipse">
             <a:avLst/>
@@ -6633,7 +6546,7 @@
           <a:p>
             <a:pPr algn="ctr"/>
             <a:r>
-              <a:rPr sz="1500" b="1">
+              <a:rPr sz="1300" b="1">
                 <a:solidFill>
                   <a:srgbClr val="FFFFFF"/>
                 </a:solidFill>
@@ -6652,8 +6565,8 @@
         </p:nvSpPr>
         <p:spPr>
           <a:xfrm>
-            <a:off x="1554480" y="4096512"/>
-            <a:ext cx="9795967" cy="960120"/>
+            <a:off x="1463040" y="3749040"/>
+            <a:ext cx="4498848" cy="914400"/>
           </a:xfrm>
           <a:prstGeom prst="rect">
             <a:avLst/>
@@ -6667,7 +6580,7 @@
           <a:lstStyle/>
           <a:p>
             <a:r>
-              <a:rPr sz="1500" b="1">
+              <a:rPr sz="1350" b="1">
                 <a:solidFill>
                   <a:srgbClr val="0A0A0A"/>
                 </a:solidFill>
@@ -6679,11 +6592,11 @@
           <a:p>
             <a:pPr>
               <a:lnSpc>
-                <a:spcPct val="128000"/>
+                <a:spcPct val="125000"/>
               </a:lnSpc>
             </a:pPr>
             <a:r>
-              <a:rPr sz="1250" b="0">
+              <a:rPr sz="1100" b="0">
                 <a:solidFill>
                   <a:srgbClr val="52525B"/>
                 </a:solidFill>
@@ -6702,8 +6615,8 @@
         </p:nvSpPr>
         <p:spPr>
           <a:xfrm>
-            <a:off x="841248" y="5074920"/>
-            <a:ext cx="457200" cy="457200"/>
+            <a:off x="841248" y="4681728"/>
+            <a:ext cx="402336" cy="402336"/>
           </a:xfrm>
           <a:prstGeom prst="ellipse">
             <a:avLst/>
@@ -6736,7 +6649,7 @@
           <a:p>
             <a:pPr algn="ctr"/>
             <a:r>
-              <a:rPr sz="1500" b="1">
+              <a:rPr sz="1300" b="1">
                 <a:solidFill>
                   <a:srgbClr val="FFFFFF"/>
                 </a:solidFill>
@@ -6755,8 +6668,8 @@
         </p:nvSpPr>
         <p:spPr>
           <a:xfrm>
-            <a:off x="1554480" y="5056632"/>
-            <a:ext cx="9795967" cy="960120"/>
+            <a:off x="1463040" y="4663440"/>
+            <a:ext cx="4498848" cy="914400"/>
           </a:xfrm>
           <a:prstGeom prst="rect">
             <a:avLst/>
@@ -6770,7 +6683,7 @@
           <a:lstStyle/>
           <a:p>
             <a:r>
-              <a:rPr sz="1500" b="1">
+              <a:rPr sz="1350" b="1">
                 <a:solidFill>
                   <a:srgbClr val="0A0A0A"/>
                 </a:solidFill>
@@ -6782,24 +6695,93 @@
           <a:p>
             <a:pPr>
               <a:lnSpc>
-                <a:spcPct val="128000"/>
+                <a:spcPct val="125000"/>
               </a:lnSpc>
             </a:pPr>
             <a:r>
-              <a:rPr sz="1250" b="0">
+              <a:rPr sz="1100" b="0">
                 <a:solidFill>
                   <a:srgbClr val="52525B"/>
                 </a:solidFill>
                 <a:latin typeface="Calibri"/>
               </a:rPr>
               <a:t>Si no corresponde, liberás (forfeited): el vehículo vuelve al catálogo para re-subastarse.</a:t>
+            </a:r>
+          </a:p>
+        </p:txBody>
+      </p:sp>
+      <p:sp>
+        <p:nvSpPr>
+          <p:cNvPr id="13" name="Rounded Rectangle 12"/>
+          <p:cNvSpPr/>
+          <p:nvPr/>
+        </p:nvSpPr>
+        <p:spPr>
+          <a:xfrm>
+            <a:off x="6419088" y="932688"/>
+            <a:ext cx="4931359" cy="5010912"/>
+          </a:xfrm>
+          <a:prstGeom prst="roundRect">
+            <a:avLst>
+              <a:gd name="adj" fmla="val 4000"/>
+            </a:avLst>
+          </a:prstGeom>
+          <a:solidFill>
+            <a:srgbClr val="F1F1F3"/>
+          </a:solidFill>
+          <a:ln w="12700">
+            <a:solidFill>
+              <a:srgbClr val="A1A1AA"/>
+            </a:solidFill>
+          </a:ln>
+          <a:effectLst/>
+        </p:spPr>
+        <p:style>
+          <a:lnRef idx="1">
+            <a:schemeClr val="accent1"/>
+          </a:lnRef>
+          <a:fillRef idx="3">
+            <a:schemeClr val="accent1"/>
+          </a:fillRef>
+          <a:effectRef idx="2">
+            <a:schemeClr val="accent1"/>
+          </a:effectRef>
+          <a:fontRef idx="minor">
+            <a:schemeClr val="lt1"/>
+          </a:fontRef>
+        </p:style>
+        <p:txBody>
+          <a:bodyPr rtlCol="0" anchor="ctr" wrap="square"/>
+          <a:lstStyle/>
+          <a:p>
+            <a:pPr algn="ctr"/>
+            <a:r>
+              <a:rPr sz="1200" b="1" spc="120">
+                <a:solidFill>
+                  <a:srgbClr val="71717A"/>
+                </a:solidFill>
+                <a:latin typeface="Calibri"/>
+              </a:rPr>
+              <a:t>CAPTURA PENDIENTE</a:t>
+            </a:r>
+          </a:p>
+          <a:p>
+            <a:pPr algn="ctr"/>
+            <a:r>
+              <a:rPr sz="1050" b="0">
+                <a:solidFill>
+                  <a:srgbClr val="A1A1AA"/>
+                </a:solidFill>
+                <a:latin typeface="Calibri"/>
+              </a:rPr>
+              <a:t>Confirmar o liberar la seña</a:t>
             </a:r>
           </a:p>
         </p:txBody>
       </p:sp>
       <p:pic>
         <p:nvPicPr>
-          <p:cNvPr id="13" name="Picture 12" descr="renew-wordmark-black.png"/>
+          <p:cNvPr id="14" name="Picture 13" descr="renew-wordmark-black.png"/>
           <p:cNvPicPr>
             <a:picLocks noChangeAspect="1"/>
           </p:cNvPicPr>
@@ -6823,7 +6805,7 @@
       </p:pic>
       <p:sp>
         <p:nvSpPr>
-          <p:cNvPr id="14" name="TextBox 13"/>
+          <p:cNvPr id="15" name="TextBox 14"/>
           <p:cNvSpPr txBox="1"/>
           <p:nvPr/>
         </p:nvSpPr>

--- a/docs/onboarding/pptx/04-finanzas.pptx
+++ b/docs/onboarding/pptx/04-finanzas.pptx
@@ -3311,7 +3311,7 @@
                 </a:solidFill>
                 <a:latin typeface="Calibri"/>
               </a:rPr>
-              <a:t>    Santa Rosa Automotores · Paraguay</a:t>
+              <a:t>    Santa Rosa Paraguay SA · Paraguay</a:t>
             </a:r>
           </a:p>
         </p:txBody>
@@ -4009,7 +4009,7 @@
                 </a:solidFill>
                 <a:latin typeface="Calibri"/>
               </a:rPr>
-              <a:t>Renew Subastas · Santa Rosa Automotores</a:t>
+              <a:t>Renew Subastas · Santa Rosa Paraguay SA</a:t>
             </a:r>
           </a:p>
         </p:txBody>
